--- a/PARADISE_presentatie/PARADISE_extern.pptx
+++ b/PARADISE_presentatie/PARADISE_extern.pptx
@@ -7475,7 +7475,7 @@
         <p:spPr>
           <a:xfrm>
             <a:off x="634984" y="2031949"/>
-            <a:ext cx="5384538" cy="3644808"/>
+            <a:ext cx="5384538" cy="3822604"/>
           </a:xfrm>
           <a:prstGeom prst="roundRect">
             <a:avLst>
@@ -7763,7 +7763,7 @@
         <p:spPr>
           <a:xfrm>
             <a:off x="6171918" y="2031949"/>
-            <a:ext cx="5384538" cy="3644808"/>
+            <a:ext cx="5384538" cy="3822604"/>
           </a:xfrm>
           <a:prstGeom prst="roundRect">
             <a:avLst>
@@ -57787,7 +57787,7 @@
         <p:spPr>
           <a:xfrm>
             <a:off x="3479713" y="3975000"/>
-            <a:ext cx="2260416" cy="1777955"/>
+            <a:ext cx="2260416" cy="1879553"/>
           </a:xfrm>
           <a:prstGeom prst="rect">
             <a:avLst/>
@@ -57806,7 +57806,7 @@
               </a:lnSpc>
             </a:pPr>
             <a:r>
-              <a:rPr sz="1450" b="0">
+              <a:rPr sz="1150" b="0">
                 <a:solidFill>
                   <a:srgbClr val="8FB6D0"/>
                 </a:solidFill>
@@ -57825,7 +57825,7 @@
               </a:spcBef>
             </a:pPr>
             <a:r>
-              <a:rPr sz="1450" b="0">
+              <a:rPr sz="1150" b="0">
                 <a:solidFill>
                   <a:srgbClr val="8FB6D0"/>
                 </a:solidFill>
@@ -57844,7 +57844,7 @@
               </a:spcBef>
             </a:pPr>
             <a:r>
-              <a:rPr sz="1450" b="0">
+              <a:rPr sz="1150" b="0">
                 <a:solidFill>
                   <a:srgbClr val="8FB6D0"/>
                 </a:solidFill>
@@ -57912,7 +57912,7 @@
         <p:spPr>
           <a:xfrm>
             <a:off x="6324314" y="2120846"/>
-            <a:ext cx="2158946" cy="1612859"/>
+            <a:ext cx="1727156" cy="1612859"/>
           </a:xfrm>
           <a:prstGeom prst="roundRect">
             <a:avLst>
@@ -57965,8 +57965,8 @@
         </p:blipFill>
         <p:spPr>
           <a:xfrm>
-            <a:off x="6400512" y="2553717"/>
-            <a:ext cx="2006549" cy="747119"/>
+            <a:off x="6387813" y="2629374"/>
+            <a:ext cx="1600159" cy="595804"/>
           </a:xfrm>
           <a:prstGeom prst="rect">
             <a:avLst/>
@@ -57981,8 +57981,8 @@
         </p:nvSpPr>
         <p:spPr>
           <a:xfrm>
-            <a:off x="8711855" y="2158946"/>
-            <a:ext cx="2666933" cy="342891"/>
+            <a:off x="8241966" y="2133546"/>
+            <a:ext cx="3060496" cy="342891"/>
           </a:xfrm>
           <a:prstGeom prst="rect">
             <a:avLst/>
@@ -58020,8 +58020,8 @@
         </p:nvSpPr>
         <p:spPr>
           <a:xfrm>
-            <a:off x="8724554" y="2527236"/>
-            <a:ext cx="2666933" cy="215894"/>
+            <a:off x="8254666" y="2501837"/>
+            <a:ext cx="3060496" cy="215894"/>
           </a:xfrm>
           <a:prstGeom prst="rect">
             <a:avLst/>
@@ -58059,8 +58059,8 @@
         </p:nvSpPr>
         <p:spPr>
           <a:xfrm>
-            <a:off x="8711855" y="2730431"/>
-            <a:ext cx="2666933" cy="355591"/>
+            <a:off x="8241966" y="2705032"/>
+            <a:ext cx="3060496" cy="355591"/>
           </a:xfrm>
           <a:prstGeom prst="rect">
             <a:avLst/>
@@ -58098,8 +58098,8 @@
         </p:nvSpPr>
         <p:spPr>
           <a:xfrm>
-            <a:off x="8711855" y="3073323"/>
-            <a:ext cx="2590608" cy="571485"/>
+            <a:off x="8241966" y="3047923"/>
+            <a:ext cx="3060496" cy="558786"/>
           </a:xfrm>
           <a:prstGeom prst="rect">
             <a:avLst/>
@@ -58156,8 +58156,8 @@
         </p:nvSpPr>
         <p:spPr>
           <a:xfrm>
-            <a:off x="8711855" y="3644808"/>
-            <a:ext cx="2666933" cy="228594"/>
+            <a:off x="8241966" y="3632109"/>
+            <a:ext cx="3060496" cy="228594"/>
           </a:xfrm>
           <a:prstGeom prst="rect">
             <a:avLst/>
@@ -58244,7 +58244,7 @@
         <p:spPr>
           <a:xfrm>
             <a:off x="6324314" y="4203594"/>
-            <a:ext cx="2158946" cy="1612859"/>
+            <a:ext cx="1727156" cy="1612859"/>
           </a:xfrm>
           <a:prstGeom prst="roundRect">
             <a:avLst>
@@ -58297,8 +58297,8 @@
         </p:blipFill>
         <p:spPr>
           <a:xfrm>
-            <a:off x="6400512" y="4454706"/>
-            <a:ext cx="2006549" cy="1110636"/>
+            <a:off x="6387813" y="4567176"/>
+            <a:ext cx="1600159" cy="885697"/>
           </a:xfrm>
           <a:prstGeom prst="rect">
             <a:avLst/>
@@ -58313,8 +58313,8 @@
         </p:nvSpPr>
         <p:spPr>
           <a:xfrm>
-            <a:off x="8711855" y="4241693"/>
-            <a:ext cx="2666933" cy="342891"/>
+            <a:off x="8241966" y="4216294"/>
+            <a:ext cx="3060496" cy="342891"/>
           </a:xfrm>
           <a:prstGeom prst="rect">
             <a:avLst/>
@@ -58352,8 +58352,8 @@
         </p:nvSpPr>
         <p:spPr>
           <a:xfrm>
-            <a:off x="8724554" y="4609984"/>
-            <a:ext cx="2666933" cy="215894"/>
+            <a:off x="8254666" y="4584585"/>
+            <a:ext cx="3060496" cy="215894"/>
           </a:xfrm>
           <a:prstGeom prst="rect">
             <a:avLst/>
@@ -58391,8 +58391,8 @@
         </p:nvSpPr>
         <p:spPr>
           <a:xfrm>
-            <a:off x="8711855" y="4813179"/>
-            <a:ext cx="2666933" cy="355591"/>
+            <a:off x="8241966" y="4787780"/>
+            <a:ext cx="3060496" cy="355591"/>
           </a:xfrm>
           <a:prstGeom prst="rect">
             <a:avLst/>
@@ -58430,8 +58430,8 @@
         </p:nvSpPr>
         <p:spPr>
           <a:xfrm>
-            <a:off x="8711855" y="5156071"/>
-            <a:ext cx="2590608" cy="571485"/>
+            <a:off x="8241966" y="5130671"/>
+            <a:ext cx="3060496" cy="558786"/>
           </a:xfrm>
           <a:prstGeom prst="rect">
             <a:avLst/>
@@ -58488,8 +58488,8 @@
         </p:nvSpPr>
         <p:spPr>
           <a:xfrm>
-            <a:off x="8711855" y="5727556"/>
-            <a:ext cx="2666933" cy="228594"/>
+            <a:off x="8241966" y="5714857"/>
+            <a:ext cx="3060496" cy="228594"/>
           </a:xfrm>
           <a:prstGeom prst="rect">
             <a:avLst/>

--- a/PARADISE_presentatie/PARADISE_extern.pptx
+++ b/PARADISE_presentatie/PARADISE_extern.pptx
@@ -9076,7 +9076,7 @@
                 </a:solidFill>
                 <a:latin typeface="Consolas"/>
               </a:rPr>
-              <a:t>80% van het eigen activiteitenprofiel</a:t>
+              <a:t>80% van de eigen waaktijd</a:t>
             </a:r>
           </a:p>
         </p:txBody>
@@ -59153,7 +59153,7 @@
                 </a:solidFill>
                 <a:latin typeface="Segoe UI"/>
               </a:rPr>
-              <a:t>Zeroing voor elke meting</a:t>
+              <a:t>Nulstellen: één keer per sessie</a:t>
             </a:r>
           </a:p>
           <a:p>
@@ -59465,7 +59465,7 @@
                 </a:solidFill>
                 <a:latin typeface="Segoe UI"/>
               </a:rPr>
-              <a:t>Batterij 100 dagen</a:t>
+              <a:t>Geheugen 100 dagen</a:t>
             </a:r>
           </a:p>
         </p:txBody>
